--- a/我們愛（讓世界不一樣)(崇拜版).pptx
+++ b/我們愛（讓世界不一樣)(崇拜版).pptx
@@ -156,7 +156,7 @@
           <a:lstStyle/>
           <a:p>
             <a:r>
-              <a:rPr lang="en-US" altLang="zh-TW" smtClean="0"/>
+              <a:rPr lang="en-US" altLang="zh-TW"/>
               <a:t>Click to edit Master title style</a:t>
             </a:r>
             <a:endParaRPr lang="zh-TW" altLang="en-US"/>
@@ -275,7 +275,7 @@
           </a:lstStyle>
           <a:p>
             <a:r>
-              <a:rPr lang="en-US" altLang="zh-TW" smtClean="0"/>
+              <a:rPr lang="en-US" altLang="zh-TW"/>
               <a:t>Click to edit Master subtitle style</a:t>
             </a:r>
             <a:endParaRPr lang="zh-TW" altLang="en-US"/>
@@ -299,7 +299,7 @@
           <a:p>
             <a:fld id="{D534D86C-C434-4FE7-A5EA-B91053132FA0}" type="datetimeFigureOut">
               <a:rPr lang="vi-VN" smtClean="0"/>
-              <a:t>03/05/2023</a:t>
+              <a:t>08/03/2025</a:t>
             </a:fld>
             <a:endParaRPr lang="vi-VN"/>
           </a:p>
@@ -393,7 +393,7 @@
           <a:lstStyle/>
           <a:p>
             <a:r>
-              <a:rPr lang="en-US" altLang="zh-TW" smtClean="0"/>
+              <a:rPr lang="en-US" altLang="zh-TW"/>
               <a:t>Click to edit Master title style</a:t>
             </a:r>
             <a:endParaRPr lang="zh-TW" altLang="en-US"/>
@@ -417,35 +417,35 @@
           <a:p>
             <a:pPr lvl="0"/>
             <a:r>
-              <a:rPr lang="en-US" altLang="zh-TW" smtClean="0"/>
+              <a:rPr lang="en-US" altLang="zh-TW"/>
               <a:t>Edit Master text styles</a:t>
             </a:r>
           </a:p>
           <a:p>
             <a:pPr lvl="1"/>
             <a:r>
-              <a:rPr lang="en-US" altLang="zh-TW" smtClean="0"/>
+              <a:rPr lang="en-US" altLang="zh-TW"/>
               <a:t>Second level</a:t>
             </a:r>
           </a:p>
           <a:p>
             <a:pPr lvl="2"/>
             <a:r>
-              <a:rPr lang="en-US" altLang="zh-TW" smtClean="0"/>
+              <a:rPr lang="en-US" altLang="zh-TW"/>
               <a:t>Third level</a:t>
             </a:r>
           </a:p>
           <a:p>
             <a:pPr lvl="3"/>
             <a:r>
-              <a:rPr lang="en-US" altLang="zh-TW" smtClean="0"/>
+              <a:rPr lang="en-US" altLang="zh-TW"/>
               <a:t>Fourth level</a:t>
             </a:r>
           </a:p>
           <a:p>
             <a:pPr lvl="4"/>
             <a:r>
-              <a:rPr lang="en-US" altLang="zh-TW" smtClean="0"/>
+              <a:rPr lang="en-US" altLang="zh-TW"/>
               <a:t>Fifth level</a:t>
             </a:r>
             <a:endParaRPr lang="zh-TW" altLang="en-US"/>
@@ -469,7 +469,7 @@
           <a:p>
             <a:fld id="{D534D86C-C434-4FE7-A5EA-B91053132FA0}" type="datetimeFigureOut">
               <a:rPr lang="vi-VN" smtClean="0"/>
-              <a:t>03/05/2023</a:t>
+              <a:t>08/03/2025</a:t>
             </a:fld>
             <a:endParaRPr lang="vi-VN"/>
           </a:p>
@@ -568,7 +568,7 @@
           <a:lstStyle/>
           <a:p>
             <a:r>
-              <a:rPr lang="en-US" altLang="zh-TW" smtClean="0"/>
+              <a:rPr lang="en-US" altLang="zh-TW"/>
               <a:t>Click to edit Master title style</a:t>
             </a:r>
             <a:endParaRPr lang="zh-TW" altLang="en-US"/>
@@ -597,35 +597,35 @@
           <a:p>
             <a:pPr lvl="0"/>
             <a:r>
-              <a:rPr lang="en-US" altLang="zh-TW" smtClean="0"/>
+              <a:rPr lang="en-US" altLang="zh-TW"/>
               <a:t>Edit Master text styles</a:t>
             </a:r>
           </a:p>
           <a:p>
             <a:pPr lvl="1"/>
             <a:r>
-              <a:rPr lang="en-US" altLang="zh-TW" smtClean="0"/>
+              <a:rPr lang="en-US" altLang="zh-TW"/>
               <a:t>Second level</a:t>
             </a:r>
           </a:p>
           <a:p>
             <a:pPr lvl="2"/>
             <a:r>
-              <a:rPr lang="en-US" altLang="zh-TW" smtClean="0"/>
+              <a:rPr lang="en-US" altLang="zh-TW"/>
               <a:t>Third level</a:t>
             </a:r>
           </a:p>
           <a:p>
             <a:pPr lvl="3"/>
             <a:r>
-              <a:rPr lang="en-US" altLang="zh-TW" smtClean="0"/>
+              <a:rPr lang="en-US" altLang="zh-TW"/>
               <a:t>Fourth level</a:t>
             </a:r>
           </a:p>
           <a:p>
             <a:pPr lvl="4"/>
             <a:r>
-              <a:rPr lang="en-US" altLang="zh-TW" smtClean="0"/>
+              <a:rPr lang="en-US" altLang="zh-TW"/>
               <a:t>Fifth level</a:t>
             </a:r>
             <a:endParaRPr lang="zh-TW" altLang="en-US"/>
@@ -649,7 +649,7 @@
           <a:p>
             <a:fld id="{D534D86C-C434-4FE7-A5EA-B91053132FA0}" type="datetimeFigureOut">
               <a:rPr lang="vi-VN" smtClean="0"/>
-              <a:t>03/05/2023</a:t>
+              <a:t>08/03/2025</a:t>
             </a:fld>
             <a:endParaRPr lang="vi-VN"/>
           </a:p>
@@ -743,7 +743,7 @@
           <a:lstStyle/>
           <a:p>
             <a:r>
-              <a:rPr lang="en-US" altLang="zh-TW" smtClean="0"/>
+              <a:rPr lang="en-US" altLang="zh-TW"/>
               <a:t>Click to edit Master title style</a:t>
             </a:r>
             <a:endParaRPr lang="zh-TW" altLang="en-US"/>
@@ -767,35 +767,35 @@
           <a:p>
             <a:pPr lvl="0"/>
             <a:r>
-              <a:rPr lang="en-US" altLang="zh-TW" smtClean="0"/>
+              <a:rPr lang="en-US" altLang="zh-TW"/>
               <a:t>Edit Master text styles</a:t>
             </a:r>
           </a:p>
           <a:p>
             <a:pPr lvl="1"/>
             <a:r>
-              <a:rPr lang="en-US" altLang="zh-TW" smtClean="0"/>
+              <a:rPr lang="en-US" altLang="zh-TW"/>
               <a:t>Second level</a:t>
             </a:r>
           </a:p>
           <a:p>
             <a:pPr lvl="2"/>
             <a:r>
-              <a:rPr lang="en-US" altLang="zh-TW" smtClean="0"/>
+              <a:rPr lang="en-US" altLang="zh-TW"/>
               <a:t>Third level</a:t>
             </a:r>
           </a:p>
           <a:p>
             <a:pPr lvl="3"/>
             <a:r>
-              <a:rPr lang="en-US" altLang="zh-TW" smtClean="0"/>
+              <a:rPr lang="en-US" altLang="zh-TW"/>
               <a:t>Fourth level</a:t>
             </a:r>
           </a:p>
           <a:p>
             <a:pPr lvl="4"/>
             <a:r>
-              <a:rPr lang="en-US" altLang="zh-TW" smtClean="0"/>
+              <a:rPr lang="en-US" altLang="zh-TW"/>
               <a:t>Fifth level</a:t>
             </a:r>
             <a:endParaRPr lang="zh-TW" altLang="en-US"/>
@@ -819,7 +819,7 @@
           <a:p>
             <a:fld id="{D534D86C-C434-4FE7-A5EA-B91053132FA0}" type="datetimeFigureOut">
               <a:rPr lang="vi-VN" smtClean="0"/>
-              <a:t>03/05/2023</a:t>
+              <a:t>08/03/2025</a:t>
             </a:fld>
             <a:endParaRPr lang="vi-VN"/>
           </a:p>
@@ -922,7 +922,7 @@
           </a:lstStyle>
           <a:p>
             <a:r>
-              <a:rPr lang="en-US" altLang="zh-TW" smtClean="0"/>
+              <a:rPr lang="en-US" altLang="zh-TW"/>
               <a:t>Click to edit Master title style</a:t>
             </a:r>
             <a:endParaRPr lang="zh-TW" altLang="en-US"/>
@@ -1042,7 +1042,7 @@
           <a:p>
             <a:pPr lvl="0"/>
             <a:r>
-              <a:rPr lang="en-US" altLang="zh-TW" smtClean="0"/>
+              <a:rPr lang="en-US" altLang="zh-TW"/>
               <a:t>Edit Master text styles</a:t>
             </a:r>
           </a:p>
@@ -1065,7 +1065,7 @@
           <a:p>
             <a:fld id="{D534D86C-C434-4FE7-A5EA-B91053132FA0}" type="datetimeFigureOut">
               <a:rPr lang="vi-VN" smtClean="0"/>
-              <a:t>03/05/2023</a:t>
+              <a:t>08/03/2025</a:t>
             </a:fld>
             <a:endParaRPr lang="vi-VN"/>
           </a:p>
@@ -1159,7 +1159,7 @@
           <a:lstStyle/>
           <a:p>
             <a:r>
-              <a:rPr lang="en-US" altLang="zh-TW" smtClean="0"/>
+              <a:rPr lang="en-US" altLang="zh-TW"/>
               <a:t>Click to edit Master title style</a:t>
             </a:r>
             <a:endParaRPr lang="zh-TW" altLang="en-US"/>
@@ -1216,35 +1216,35 @@
           <a:p>
             <a:pPr lvl="0"/>
             <a:r>
-              <a:rPr lang="en-US" altLang="zh-TW" smtClean="0"/>
+              <a:rPr lang="en-US" altLang="zh-TW"/>
               <a:t>Edit Master text styles</a:t>
             </a:r>
           </a:p>
           <a:p>
             <a:pPr lvl="1"/>
             <a:r>
-              <a:rPr lang="en-US" altLang="zh-TW" smtClean="0"/>
+              <a:rPr lang="en-US" altLang="zh-TW"/>
               <a:t>Second level</a:t>
             </a:r>
           </a:p>
           <a:p>
             <a:pPr lvl="2"/>
             <a:r>
-              <a:rPr lang="en-US" altLang="zh-TW" smtClean="0"/>
+              <a:rPr lang="en-US" altLang="zh-TW"/>
               <a:t>Third level</a:t>
             </a:r>
           </a:p>
           <a:p>
             <a:pPr lvl="3"/>
             <a:r>
-              <a:rPr lang="en-US" altLang="zh-TW" smtClean="0"/>
+              <a:rPr lang="en-US" altLang="zh-TW"/>
               <a:t>Fourth level</a:t>
             </a:r>
           </a:p>
           <a:p>
             <a:pPr lvl="4"/>
             <a:r>
-              <a:rPr lang="en-US" altLang="zh-TW" smtClean="0"/>
+              <a:rPr lang="en-US" altLang="zh-TW"/>
               <a:t>Fifth level</a:t>
             </a:r>
             <a:endParaRPr lang="zh-TW" altLang="en-US"/>
@@ -1301,35 +1301,35 @@
           <a:p>
             <a:pPr lvl="0"/>
             <a:r>
-              <a:rPr lang="en-US" altLang="zh-TW" smtClean="0"/>
+              <a:rPr lang="en-US" altLang="zh-TW"/>
               <a:t>Edit Master text styles</a:t>
             </a:r>
           </a:p>
           <a:p>
             <a:pPr lvl="1"/>
             <a:r>
-              <a:rPr lang="en-US" altLang="zh-TW" smtClean="0"/>
+              <a:rPr lang="en-US" altLang="zh-TW"/>
               <a:t>Second level</a:t>
             </a:r>
           </a:p>
           <a:p>
             <a:pPr lvl="2"/>
             <a:r>
-              <a:rPr lang="en-US" altLang="zh-TW" smtClean="0"/>
+              <a:rPr lang="en-US" altLang="zh-TW"/>
               <a:t>Third level</a:t>
             </a:r>
           </a:p>
           <a:p>
             <a:pPr lvl="3"/>
             <a:r>
-              <a:rPr lang="en-US" altLang="zh-TW" smtClean="0"/>
+              <a:rPr lang="en-US" altLang="zh-TW"/>
               <a:t>Fourth level</a:t>
             </a:r>
           </a:p>
           <a:p>
             <a:pPr lvl="4"/>
             <a:r>
-              <a:rPr lang="en-US" altLang="zh-TW" smtClean="0"/>
+              <a:rPr lang="en-US" altLang="zh-TW"/>
               <a:t>Fifth level</a:t>
             </a:r>
             <a:endParaRPr lang="zh-TW" altLang="en-US"/>
@@ -1353,7 +1353,7 @@
           <a:p>
             <a:fld id="{D534D86C-C434-4FE7-A5EA-B91053132FA0}" type="datetimeFigureOut">
               <a:rPr lang="vi-VN" smtClean="0"/>
-              <a:t>03/05/2023</a:t>
+              <a:t>08/03/2025</a:t>
             </a:fld>
             <a:endParaRPr lang="vi-VN"/>
           </a:p>
@@ -1451,7 +1451,7 @@
           </a:lstStyle>
           <a:p>
             <a:r>
-              <a:rPr lang="en-US" altLang="zh-TW" smtClean="0"/>
+              <a:rPr lang="en-US" altLang="zh-TW"/>
               <a:t>Click to edit Master title style</a:t>
             </a:r>
             <a:endParaRPr lang="zh-TW" altLang="en-US"/>
@@ -1517,7 +1517,7 @@
           <a:p>
             <a:pPr lvl="0"/>
             <a:r>
-              <a:rPr lang="en-US" altLang="zh-TW" smtClean="0"/>
+              <a:rPr lang="en-US" altLang="zh-TW"/>
               <a:t>Edit Master text styles</a:t>
             </a:r>
           </a:p>
@@ -1573,35 +1573,35 @@
           <a:p>
             <a:pPr lvl="0"/>
             <a:r>
-              <a:rPr lang="en-US" altLang="zh-TW" smtClean="0"/>
+              <a:rPr lang="en-US" altLang="zh-TW"/>
               <a:t>Edit Master text styles</a:t>
             </a:r>
           </a:p>
           <a:p>
             <a:pPr lvl="1"/>
             <a:r>
-              <a:rPr lang="en-US" altLang="zh-TW" smtClean="0"/>
+              <a:rPr lang="en-US" altLang="zh-TW"/>
               <a:t>Second level</a:t>
             </a:r>
           </a:p>
           <a:p>
             <a:pPr lvl="2"/>
             <a:r>
-              <a:rPr lang="en-US" altLang="zh-TW" smtClean="0"/>
+              <a:rPr lang="en-US" altLang="zh-TW"/>
               <a:t>Third level</a:t>
             </a:r>
           </a:p>
           <a:p>
             <a:pPr lvl="3"/>
             <a:r>
-              <a:rPr lang="en-US" altLang="zh-TW" smtClean="0"/>
+              <a:rPr lang="en-US" altLang="zh-TW"/>
               <a:t>Fourth level</a:t>
             </a:r>
           </a:p>
           <a:p>
             <a:pPr lvl="4"/>
             <a:r>
-              <a:rPr lang="en-US" altLang="zh-TW" smtClean="0"/>
+              <a:rPr lang="en-US" altLang="zh-TW"/>
               <a:t>Fifth level</a:t>
             </a:r>
             <a:endParaRPr lang="zh-TW" altLang="en-US"/>
@@ -1667,7 +1667,7 @@
           <a:p>
             <a:pPr lvl="0"/>
             <a:r>
-              <a:rPr lang="en-US" altLang="zh-TW" smtClean="0"/>
+              <a:rPr lang="en-US" altLang="zh-TW"/>
               <a:t>Edit Master text styles</a:t>
             </a:r>
           </a:p>
@@ -1723,35 +1723,35 @@
           <a:p>
             <a:pPr lvl="0"/>
             <a:r>
-              <a:rPr lang="en-US" altLang="zh-TW" smtClean="0"/>
+              <a:rPr lang="en-US" altLang="zh-TW"/>
               <a:t>Edit Master text styles</a:t>
             </a:r>
           </a:p>
           <a:p>
             <a:pPr lvl="1"/>
             <a:r>
-              <a:rPr lang="en-US" altLang="zh-TW" smtClean="0"/>
+              <a:rPr lang="en-US" altLang="zh-TW"/>
               <a:t>Second level</a:t>
             </a:r>
           </a:p>
           <a:p>
             <a:pPr lvl="2"/>
             <a:r>
-              <a:rPr lang="en-US" altLang="zh-TW" smtClean="0"/>
+              <a:rPr lang="en-US" altLang="zh-TW"/>
               <a:t>Third level</a:t>
             </a:r>
           </a:p>
           <a:p>
             <a:pPr lvl="3"/>
             <a:r>
-              <a:rPr lang="en-US" altLang="zh-TW" smtClean="0"/>
+              <a:rPr lang="en-US" altLang="zh-TW"/>
               <a:t>Fourth level</a:t>
             </a:r>
           </a:p>
           <a:p>
             <a:pPr lvl="4"/>
             <a:r>
-              <a:rPr lang="en-US" altLang="zh-TW" smtClean="0"/>
+              <a:rPr lang="en-US" altLang="zh-TW"/>
               <a:t>Fifth level</a:t>
             </a:r>
             <a:endParaRPr lang="zh-TW" altLang="en-US"/>
@@ -1775,7 +1775,7 @@
           <a:p>
             <a:fld id="{D534D86C-C434-4FE7-A5EA-B91053132FA0}" type="datetimeFigureOut">
               <a:rPr lang="vi-VN" smtClean="0"/>
-              <a:t>03/05/2023</a:t>
+              <a:t>08/03/2025</a:t>
             </a:fld>
             <a:endParaRPr lang="vi-VN"/>
           </a:p>
@@ -1869,7 +1869,7 @@
           <a:lstStyle/>
           <a:p>
             <a:r>
-              <a:rPr lang="en-US" altLang="zh-TW" smtClean="0"/>
+              <a:rPr lang="en-US" altLang="zh-TW"/>
               <a:t>Click to edit Master title style</a:t>
             </a:r>
             <a:endParaRPr lang="zh-TW" altLang="en-US"/>
@@ -1893,7 +1893,7 @@
           <a:p>
             <a:fld id="{D534D86C-C434-4FE7-A5EA-B91053132FA0}" type="datetimeFigureOut">
               <a:rPr lang="vi-VN" smtClean="0"/>
-              <a:t>03/05/2023</a:t>
+              <a:t>08/03/2025</a:t>
             </a:fld>
             <a:endParaRPr lang="vi-VN"/>
           </a:p>
@@ -1988,7 +1988,7 @@
           <a:p>
             <a:fld id="{D534D86C-C434-4FE7-A5EA-B91053132FA0}" type="datetimeFigureOut">
               <a:rPr lang="vi-VN" smtClean="0"/>
-              <a:t>03/05/2023</a:t>
+              <a:t>08/03/2025</a:t>
             </a:fld>
             <a:endParaRPr lang="vi-VN"/>
           </a:p>
@@ -2091,7 +2091,7 @@
           </a:lstStyle>
           <a:p>
             <a:r>
-              <a:rPr lang="en-US" altLang="zh-TW" smtClean="0"/>
+              <a:rPr lang="en-US" altLang="zh-TW"/>
               <a:t>Click to edit Master title style</a:t>
             </a:r>
             <a:endParaRPr lang="zh-TW" altLang="en-US"/>
@@ -2148,35 +2148,35 @@
           <a:p>
             <a:pPr lvl="0"/>
             <a:r>
-              <a:rPr lang="en-US" altLang="zh-TW" smtClean="0"/>
+              <a:rPr lang="en-US" altLang="zh-TW"/>
               <a:t>Edit Master text styles</a:t>
             </a:r>
           </a:p>
           <a:p>
             <a:pPr lvl="1"/>
             <a:r>
-              <a:rPr lang="en-US" altLang="zh-TW" smtClean="0"/>
+              <a:rPr lang="en-US" altLang="zh-TW"/>
               <a:t>Second level</a:t>
             </a:r>
           </a:p>
           <a:p>
             <a:pPr lvl="2"/>
             <a:r>
-              <a:rPr lang="en-US" altLang="zh-TW" smtClean="0"/>
+              <a:rPr lang="en-US" altLang="zh-TW"/>
               <a:t>Third level</a:t>
             </a:r>
           </a:p>
           <a:p>
             <a:pPr lvl="3"/>
             <a:r>
-              <a:rPr lang="en-US" altLang="zh-TW" smtClean="0"/>
+              <a:rPr lang="en-US" altLang="zh-TW"/>
               <a:t>Fourth level</a:t>
             </a:r>
           </a:p>
           <a:p>
             <a:pPr lvl="4"/>
             <a:r>
-              <a:rPr lang="en-US" altLang="zh-TW" smtClean="0"/>
+              <a:rPr lang="en-US" altLang="zh-TW"/>
               <a:t>Fifth level</a:t>
             </a:r>
             <a:endParaRPr lang="zh-TW" altLang="en-US"/>
@@ -2242,7 +2242,7 @@
           <a:p>
             <a:pPr lvl="0"/>
             <a:r>
-              <a:rPr lang="en-US" altLang="zh-TW" smtClean="0"/>
+              <a:rPr lang="en-US" altLang="zh-TW"/>
               <a:t>Edit Master text styles</a:t>
             </a:r>
           </a:p>
@@ -2265,7 +2265,7 @@
           <a:p>
             <a:fld id="{D534D86C-C434-4FE7-A5EA-B91053132FA0}" type="datetimeFigureOut">
               <a:rPr lang="vi-VN" smtClean="0"/>
-              <a:t>03/05/2023</a:t>
+              <a:t>08/03/2025</a:t>
             </a:fld>
             <a:endParaRPr lang="vi-VN"/>
           </a:p>
@@ -2368,7 +2368,7 @@
           </a:lstStyle>
           <a:p>
             <a:r>
-              <a:rPr lang="en-US" altLang="zh-TW" smtClean="0"/>
+              <a:rPr lang="en-US" altLang="zh-TW"/>
               <a:t>Click to edit Master title style</a:t>
             </a:r>
             <a:endParaRPr lang="zh-TW" altLang="en-US"/>
@@ -2433,7 +2433,7 @@
           </a:lstStyle>
           <a:p>
             <a:r>
-              <a:rPr lang="en-US" altLang="zh-TW" smtClean="0"/>
+              <a:rPr lang="en-US" altLang="zh-TW"/>
               <a:t>Click icon to add picture</a:t>
             </a:r>
             <a:endParaRPr lang="zh-TW" altLang="en-US"/>
@@ -2499,7 +2499,7 @@
           <a:p>
             <a:pPr lvl="0"/>
             <a:r>
-              <a:rPr lang="en-US" altLang="zh-TW" smtClean="0"/>
+              <a:rPr lang="en-US" altLang="zh-TW"/>
               <a:t>Edit Master text styles</a:t>
             </a:r>
           </a:p>
@@ -2522,7 +2522,7 @@
           <a:p>
             <a:fld id="{D534D86C-C434-4FE7-A5EA-B91053132FA0}" type="datetimeFigureOut">
               <a:rPr lang="vi-VN" smtClean="0"/>
-              <a:t>03/05/2023</a:t>
+              <a:t>08/03/2025</a:t>
             </a:fld>
             <a:endParaRPr lang="vi-VN"/>
           </a:p>
@@ -2636,10 +2636,9 @@
           <a:lstStyle/>
           <a:p>
             <a:r>
-              <a:rPr lang="zh-TW" altLang="en-US" smtClean="0"/>
+              <a:rPr lang="zh-TW" altLang="en-US"/>
               <a:t>按一下以編輯母片標題樣式</a:t>
             </a:r>
-            <a:endParaRPr lang="zh-TW" altLang="en-US"/>
           </a:p>
         </p:txBody>
       </p:sp>
@@ -2670,38 +2669,37 @@
           <a:p>
             <a:pPr lvl="0"/>
             <a:r>
-              <a:rPr lang="zh-TW" altLang="en-US" smtClean="0"/>
+              <a:rPr lang="zh-TW" altLang="en-US"/>
               <a:t>按一下以編輯母片文字樣式</a:t>
             </a:r>
           </a:p>
           <a:p>
             <a:pPr lvl="1"/>
             <a:r>
-              <a:rPr lang="zh-TW" altLang="en-US" smtClean="0"/>
+              <a:rPr lang="zh-TW" altLang="en-US"/>
               <a:t>第二層</a:t>
             </a:r>
           </a:p>
           <a:p>
             <a:pPr lvl="2"/>
             <a:r>
-              <a:rPr lang="zh-TW" altLang="en-US" smtClean="0"/>
+              <a:rPr lang="zh-TW" altLang="en-US"/>
               <a:t>第三層</a:t>
             </a:r>
           </a:p>
           <a:p>
             <a:pPr lvl="3"/>
             <a:r>
-              <a:rPr lang="zh-TW" altLang="en-US" smtClean="0"/>
+              <a:rPr lang="zh-TW" altLang="en-US"/>
               <a:t>第四層</a:t>
             </a:r>
           </a:p>
           <a:p>
             <a:pPr lvl="4"/>
             <a:r>
-              <a:rPr lang="zh-TW" altLang="en-US" smtClean="0"/>
+              <a:rPr lang="zh-TW" altLang="en-US"/>
               <a:t>第五層</a:t>
             </a:r>
-            <a:endParaRPr lang="zh-TW" altLang="en-US"/>
           </a:p>
         </p:txBody>
       </p:sp>
@@ -2740,7 +2738,7 @@
           <a:p>
             <a:fld id="{D534D86C-C434-4FE7-A5EA-B91053132FA0}" type="datetimeFigureOut">
               <a:rPr lang="vi-VN" smtClean="0"/>
-              <a:t>03/05/2023</a:t>
+              <a:t>08/03/2025</a:t>
             </a:fld>
             <a:endParaRPr lang="vi-VN"/>
           </a:p>
@@ -3138,7 +3136,7 @@
           <a:lstStyle/>
           <a:p>
             <a:r>
-              <a:rPr lang="zh-TW" altLang="en-US" sz="7200" b="1" i="1" dirty="0" smtClean="0">
+              <a:rPr lang="zh-TW" altLang="en-US" sz="7200" b="1" i="1" dirty="0">
                 <a:solidFill>
                   <a:srgbClr val="000066"/>
                 </a:solidFill>
@@ -3152,24 +3150,7 @@
                 <a:latin typeface="微軟正黑體" pitchFamily="34" charset="-120"/>
                 <a:ea typeface="微軟正黑體" pitchFamily="34" charset="-120"/>
               </a:rPr>
-              <a:t>我</a:t>
-            </a:r>
-            <a:r>
-              <a:rPr lang="zh-TW" altLang="en-US" sz="7200" b="1" i="1" dirty="0">
-                <a:solidFill>
-                  <a:srgbClr val="000066"/>
-                </a:solidFill>
-                <a:effectLst>
-                  <a:outerShdw blurRad="38100" dist="38100" dir="2700000" algn="tl">
-                    <a:srgbClr val="000000">
-                      <a:alpha val="43137"/>
-                    </a:srgbClr>
-                  </a:outerShdw>
-                </a:effectLst>
-                <a:latin typeface="微軟正黑體" pitchFamily="34" charset="-120"/>
-                <a:ea typeface="微軟正黑體" pitchFamily="34" charset="-120"/>
-              </a:rPr>
-              <a:t>們愛（讓世界不一樣）</a:t>
+              <a:t>我們愛（讓世界不一樣）</a:t>
             </a:r>
             <a:endParaRPr lang="zh-CN" altLang="en-US" sz="7200" b="1" i="1" dirty="0">
               <a:solidFill>
@@ -3244,24 +3225,14 @@
               <a:buNone/>
             </a:pPr>
             <a:r>
-              <a:rPr lang="zh-TW" altLang="en-US" sz="6400" b="1" dirty="0" smtClean="0">
+              <a:rPr lang="zh-TW" altLang="en-US" sz="6400" b="1" dirty="0">
                 <a:solidFill>
                   <a:srgbClr val="000066"/>
                 </a:solidFill>
                 <a:latin typeface="微軟正黑體" pitchFamily="34" charset="-120"/>
                 <a:ea typeface="微軟正黑體" pitchFamily="34" charset="-120"/>
               </a:rPr>
-              <a:t>你</a:t>
-            </a:r>
-            <a:r>
-              <a:rPr lang="zh-TW" altLang="en-US" sz="6400" b="1" dirty="0">
-                <a:solidFill>
-                  <a:srgbClr val="000066"/>
-                </a:solidFill>
-                <a:latin typeface="微軟正黑體" pitchFamily="34" charset="-120"/>
-                <a:ea typeface="微軟正黑體" pitchFamily="34" charset="-120"/>
-              </a:rPr>
-              <a:t>和我是天父愛的創造</a:t>
+              <a:t>你和我是天父愛的創造</a:t>
             </a:r>
             <a:endParaRPr lang="en-US" altLang="zh-TW" sz="6400" b="1" dirty="0">
               <a:solidFill>
@@ -3319,7 +3290,7 @@
           <a:p>
             <a:pPr algn="ctr"/>
             <a:r>
-              <a:rPr lang="en-US" sz="3600" b="1" dirty="0" smtClean="0">
+              <a:rPr lang="en-US" sz="3600" b="1" dirty="0">
                 <a:solidFill>
                   <a:srgbClr val="000066"/>
                 </a:solidFill>
@@ -3329,17 +3300,17 @@
               <a:t>( </a:t>
             </a:r>
             <a:r>
-              <a:rPr lang="zh-CN" altLang="en-US" sz="3600" b="1" dirty="0" smtClean="0">
+              <a:rPr lang="zh-CN" altLang="en-US" sz="3600" b="1" dirty="0">
                 <a:solidFill>
                   <a:srgbClr val="000066"/>
                 </a:solidFill>
                 <a:latin typeface="Microsoft JhengHei" panose="020B0604030504040204" pitchFamily="34" charset="-120"/>
                 <a:ea typeface="Microsoft JhengHei" panose="020B0604030504040204" pitchFamily="34" charset="-120"/>
               </a:rPr>
-              <a:t>正</a:t>
-            </a:r>
-            <a:r>
-              <a:rPr lang="en-US" sz="3600" b="1" dirty="0" smtClean="0">
+              <a:t>正歌</a:t>
+            </a:r>
+            <a:r>
+              <a:rPr lang="en-US" sz="3600" b="1" dirty="0">
                 <a:solidFill>
                   <a:srgbClr val="000066"/>
                 </a:solidFill>
@@ -3478,7 +3449,7 @@
           <a:p>
             <a:pPr algn="ctr"/>
             <a:r>
-              <a:rPr lang="en-US" sz="3600" b="1" dirty="0" smtClean="0">
+              <a:rPr lang="en-US" sz="3600" b="1" dirty="0">
                 <a:solidFill>
                   <a:srgbClr val="000066"/>
                 </a:solidFill>
@@ -3488,17 +3459,17 @@
               <a:t>( </a:t>
             </a:r>
             <a:r>
-              <a:rPr lang="zh-CN" altLang="en-US" sz="3600" b="1" dirty="0" smtClean="0">
+              <a:rPr lang="zh-CN" altLang="en-US" sz="3600" b="1" dirty="0">
                 <a:solidFill>
                   <a:srgbClr val="000066"/>
                 </a:solidFill>
                 <a:latin typeface="Microsoft JhengHei" panose="020B0604030504040204" pitchFamily="34" charset="-120"/>
                 <a:ea typeface="Microsoft JhengHei" panose="020B0604030504040204" pitchFamily="34" charset="-120"/>
               </a:rPr>
-              <a:t>正</a:t>
-            </a:r>
-            <a:r>
-              <a:rPr lang="en-US" sz="3600" b="1" dirty="0" smtClean="0">
+              <a:t>正歌</a:t>
+            </a:r>
+            <a:r>
+              <a:rPr lang="en-US" sz="3600" b="1" dirty="0">
                 <a:solidFill>
                   <a:srgbClr val="000066"/>
                 </a:solidFill>
@@ -3615,7 +3586,7 @@
           <a:p>
             <a:pPr algn="ctr"/>
             <a:r>
-              <a:rPr lang="en-US" sz="3600" b="1" dirty="0" smtClean="0">
+              <a:rPr lang="en-US" sz="3600" b="1" dirty="0">
                 <a:solidFill>
                   <a:srgbClr val="000066"/>
                 </a:solidFill>
@@ -3625,34 +3596,24 @@
               <a:t>( </a:t>
             </a:r>
             <a:r>
-              <a:rPr lang="zh-CN" altLang="en-US" sz="3600" b="1" dirty="0" smtClean="0">
+              <a:rPr lang="zh-CN" altLang="en-US" sz="3600" b="1" dirty="0">
                 <a:solidFill>
                   <a:srgbClr val="000066"/>
                 </a:solidFill>
                 <a:latin typeface="Microsoft JhengHei" panose="020B0604030504040204" pitchFamily="34" charset="-120"/>
                 <a:ea typeface="Microsoft JhengHei" panose="020B0604030504040204" pitchFamily="34" charset="-120"/>
               </a:rPr>
-              <a:t>副</a:t>
-            </a:r>
-            <a:r>
-              <a:rPr lang="en-US" sz="3600" b="1" dirty="0" smtClean="0">
+              <a:t>副歌</a:t>
+            </a:r>
+            <a:r>
+              <a:rPr lang="en-US" sz="3600" b="1" dirty="0">
                 <a:solidFill>
                   <a:srgbClr val="000066"/>
                 </a:solidFill>
                 <a:latin typeface="Microsoft JhengHei" panose="020B0604030504040204" pitchFamily="34" charset="-120"/>
                 <a:ea typeface="Microsoft JhengHei" panose="020B0604030504040204" pitchFamily="34" charset="-120"/>
               </a:rPr>
-              <a:t> </a:t>
-            </a:r>
-            <a:r>
-              <a:rPr lang="en-US" sz="3600" b="1" dirty="0" smtClean="0">
-                <a:solidFill>
-                  <a:srgbClr val="000066"/>
-                </a:solidFill>
-                <a:latin typeface="Microsoft JhengHei" panose="020B0604030504040204" pitchFamily="34" charset="-120"/>
-                <a:ea typeface="Microsoft JhengHei" panose="020B0604030504040204" pitchFamily="34" charset="-120"/>
-              </a:rPr>
-              <a:t>)</a:t>
+              <a:t> )</a:t>
             </a:r>
             <a:endParaRPr lang="vi-VN" sz="3600" b="1" dirty="0">
               <a:solidFill>
@@ -3784,7 +3745,7 @@
           <a:p>
             <a:pPr algn="ctr"/>
             <a:r>
-              <a:rPr lang="en-US" sz="3600" b="1" dirty="0" smtClean="0">
+              <a:rPr lang="en-US" sz="3600" b="1" dirty="0">
                 <a:solidFill>
                   <a:srgbClr val="000066"/>
                 </a:solidFill>
@@ -3794,34 +3755,24 @@
               <a:t>( </a:t>
             </a:r>
             <a:r>
-              <a:rPr lang="zh-CN" altLang="en-US" sz="3600" b="1" dirty="0" smtClean="0">
+              <a:rPr lang="zh-CN" altLang="en-US" sz="3600" b="1" dirty="0">
                 <a:solidFill>
                   <a:srgbClr val="000066"/>
                 </a:solidFill>
                 <a:latin typeface="Microsoft JhengHei" panose="020B0604030504040204" pitchFamily="34" charset="-120"/>
                 <a:ea typeface="Microsoft JhengHei" panose="020B0604030504040204" pitchFamily="34" charset="-120"/>
               </a:rPr>
-              <a:t>副</a:t>
-            </a:r>
-            <a:r>
-              <a:rPr lang="en-US" sz="3600" b="1" dirty="0" smtClean="0">
+              <a:t>副歌</a:t>
+            </a:r>
+            <a:r>
+              <a:rPr lang="en-US" sz="3600" b="1" dirty="0">
                 <a:solidFill>
                   <a:srgbClr val="000066"/>
                 </a:solidFill>
                 <a:latin typeface="Microsoft JhengHei" panose="020B0604030504040204" pitchFamily="34" charset="-120"/>
                 <a:ea typeface="Microsoft JhengHei" panose="020B0604030504040204" pitchFamily="34" charset="-120"/>
               </a:rPr>
-              <a:t> </a:t>
-            </a:r>
-            <a:r>
-              <a:rPr lang="en-US" sz="3600" b="1" dirty="0" smtClean="0">
-                <a:solidFill>
-                  <a:srgbClr val="000066"/>
-                </a:solidFill>
-                <a:latin typeface="Microsoft JhengHei" panose="020B0604030504040204" pitchFamily="34" charset="-120"/>
-                <a:ea typeface="Microsoft JhengHei" panose="020B0604030504040204" pitchFamily="34" charset="-120"/>
-              </a:rPr>
-              <a:t>)</a:t>
+              <a:t> )</a:t>
             </a:r>
             <a:endParaRPr lang="vi-VN" sz="3600" b="1" dirty="0">
               <a:solidFill>
@@ -3895,19 +3846,9 @@
                 <a:latin typeface="微軟正黑體" pitchFamily="34" charset="-120"/>
                 <a:ea typeface="微軟正黑體" pitchFamily="34" charset="-120"/>
               </a:rPr>
-              <a:t>我們愛  因神先愛我</a:t>
-            </a:r>
-            <a:r>
-              <a:rPr lang="zh-TW" altLang="en-US" sz="6400" b="1" dirty="0" smtClean="0">
-                <a:solidFill>
-                  <a:srgbClr val="000066"/>
-                </a:solidFill>
-                <a:latin typeface="微軟正黑體" pitchFamily="34" charset="-120"/>
-                <a:ea typeface="微軟正黑體" pitchFamily="34" charset="-120"/>
-              </a:rPr>
-              <a:t>們</a:t>
-            </a:r>
-            <a:endParaRPr lang="en-US" altLang="zh-TW" sz="6400" b="1" dirty="0" smtClean="0">
+              <a:t>我們愛  因神先愛我們</a:t>
+            </a:r>
+            <a:endParaRPr lang="en-US" altLang="zh-TW" sz="6400" b="1" dirty="0">
               <a:solidFill>
                 <a:srgbClr val="000066"/>
               </a:solidFill>
@@ -3927,17 +3868,7 @@
                 <a:latin typeface="微軟正黑體" pitchFamily="34" charset="-120"/>
                 <a:ea typeface="微軟正黑體" pitchFamily="34" charset="-120"/>
               </a:rPr>
-              <a:t>心再堅強也不要獨自飛</a:t>
-            </a:r>
-            <a:r>
-              <a:rPr lang="zh-TW" altLang="en-US" sz="6400" b="1" dirty="0">
-                <a:solidFill>
-                  <a:srgbClr val="000066"/>
-                </a:solidFill>
-                <a:latin typeface="微軟正黑體" pitchFamily="34" charset="-120"/>
-                <a:ea typeface="微軟正黑體" pitchFamily="34" charset="-120"/>
-              </a:rPr>
-              <a:t>翔</a:t>
+              <a:t>心再堅強也不要獨自飛翔</a:t>
             </a:r>
             <a:endParaRPr lang="en-US" altLang="zh-TW" sz="6400" b="1" dirty="0">
               <a:solidFill>
@@ -3973,7 +3904,7 @@
           <a:p>
             <a:pPr algn="ctr"/>
             <a:r>
-              <a:rPr lang="en-US" sz="3600" b="1" dirty="0" smtClean="0">
+              <a:rPr lang="en-US" sz="3600" b="1" dirty="0">
                 <a:solidFill>
                   <a:srgbClr val="000066"/>
                 </a:solidFill>
@@ -3983,34 +3914,24 @@
               <a:t>( </a:t>
             </a:r>
             <a:r>
-              <a:rPr lang="zh-CN" altLang="en-US" sz="3600" b="1" dirty="0" smtClean="0">
+              <a:rPr lang="zh-CN" altLang="en-US" sz="3600" b="1" dirty="0">
                 <a:solidFill>
                   <a:srgbClr val="000066"/>
                 </a:solidFill>
                 <a:latin typeface="Microsoft JhengHei" panose="020B0604030504040204" pitchFamily="34" charset="-120"/>
                 <a:ea typeface="Microsoft JhengHei" panose="020B0604030504040204" pitchFamily="34" charset="-120"/>
               </a:rPr>
-              <a:t>副</a:t>
-            </a:r>
-            <a:r>
-              <a:rPr lang="en-US" sz="3600" b="1" dirty="0" smtClean="0">
+              <a:t>副歌</a:t>
+            </a:r>
+            <a:r>
+              <a:rPr lang="en-US" sz="3600" b="1" dirty="0">
                 <a:solidFill>
                   <a:srgbClr val="000066"/>
                 </a:solidFill>
                 <a:latin typeface="Microsoft JhengHei" panose="020B0604030504040204" pitchFamily="34" charset="-120"/>
                 <a:ea typeface="Microsoft JhengHei" panose="020B0604030504040204" pitchFamily="34" charset="-120"/>
               </a:rPr>
-              <a:t> </a:t>
-            </a:r>
-            <a:r>
-              <a:rPr lang="en-US" sz="3600" b="1" dirty="0" smtClean="0">
-                <a:solidFill>
-                  <a:srgbClr val="000066"/>
-                </a:solidFill>
-                <a:latin typeface="Microsoft JhengHei" panose="020B0604030504040204" pitchFamily="34" charset="-120"/>
-                <a:ea typeface="Microsoft JhengHei" panose="020B0604030504040204" pitchFamily="34" charset="-120"/>
-              </a:rPr>
-              <a:t>)</a:t>
+              <a:t> )</a:t>
             </a:r>
             <a:endParaRPr lang="vi-VN" sz="3600" b="1" dirty="0">
               <a:solidFill>
@@ -4142,7 +4063,7 @@
           <a:p>
             <a:pPr algn="ctr"/>
             <a:r>
-              <a:rPr lang="en-US" sz="3600" b="1" dirty="0" smtClean="0">
+              <a:rPr lang="en-US" sz="3600" b="1" dirty="0">
                 <a:solidFill>
                   <a:srgbClr val="000066"/>
                 </a:solidFill>
@@ -4152,34 +4073,24 @@
               <a:t>( </a:t>
             </a:r>
             <a:r>
-              <a:rPr lang="zh-CN" altLang="en-US" sz="3600" b="1" dirty="0" smtClean="0">
+              <a:rPr lang="zh-CN" altLang="en-US" sz="3600" b="1" dirty="0">
                 <a:solidFill>
                   <a:srgbClr val="000066"/>
                 </a:solidFill>
                 <a:latin typeface="Microsoft JhengHei" panose="020B0604030504040204" pitchFamily="34" charset="-120"/>
                 <a:ea typeface="Microsoft JhengHei" panose="020B0604030504040204" pitchFamily="34" charset="-120"/>
               </a:rPr>
-              <a:t>副</a:t>
-            </a:r>
-            <a:r>
-              <a:rPr lang="en-US" sz="3600" b="1" dirty="0" smtClean="0">
+              <a:t>副歌</a:t>
+            </a:r>
+            <a:r>
+              <a:rPr lang="en-US" sz="3600" b="1" dirty="0">
                 <a:solidFill>
                   <a:srgbClr val="000066"/>
                 </a:solidFill>
                 <a:latin typeface="Microsoft JhengHei" panose="020B0604030504040204" pitchFamily="34" charset="-120"/>
                 <a:ea typeface="Microsoft JhengHei" panose="020B0604030504040204" pitchFamily="34" charset="-120"/>
               </a:rPr>
-              <a:t> </a:t>
-            </a:r>
-            <a:r>
-              <a:rPr lang="en-US" sz="3600" b="1" dirty="0" smtClean="0">
-                <a:solidFill>
-                  <a:srgbClr val="000066"/>
-                </a:solidFill>
-                <a:latin typeface="Microsoft JhengHei" panose="020B0604030504040204" pitchFamily="34" charset="-120"/>
-                <a:ea typeface="Microsoft JhengHei" panose="020B0604030504040204" pitchFamily="34" charset="-120"/>
-              </a:rPr>
-              <a:t>)</a:t>
+              <a:t> )</a:t>
             </a:r>
             <a:endParaRPr lang="vi-VN" sz="3600" b="1" dirty="0">
               <a:solidFill>
